--- a/figure_pipeline/fig6_external_validation_acdb/assemble_fig6/assemble_fig6.pptx
+++ b/figure_pipeline/fig6_external_validation_acdb/assemble_fig6/assemble_fig6.pptx
@@ -259,7 +259,7 @@
           <a:p>
             <a:fld id="{513CA52F-1DA9-4BF4-A3AC-3E0151F9508D}" type="datetimeFigureOut">
               <a:rPr lang="en-US" smtClean="0"/>
-              <a:t>8/23/2026</a:t>
+              <a:t>9/1/2026</a:t>
             </a:fld>
             <a:endParaRPr lang="en-US"/>
           </a:p>
@@ -457,7 +457,7 @@
           <a:p>
             <a:fld id="{513CA52F-1DA9-4BF4-A3AC-3E0151F9508D}" type="datetimeFigureOut">
               <a:rPr lang="en-US" smtClean="0"/>
-              <a:t>8/23/2026</a:t>
+              <a:t>9/1/2026</a:t>
             </a:fld>
             <a:endParaRPr lang="en-US"/>
           </a:p>
@@ -665,7 +665,7 @@
           <a:p>
             <a:fld id="{513CA52F-1DA9-4BF4-A3AC-3E0151F9508D}" type="datetimeFigureOut">
               <a:rPr lang="en-US" smtClean="0"/>
-              <a:t>8/23/2026</a:t>
+              <a:t>9/1/2026</a:t>
             </a:fld>
             <a:endParaRPr lang="en-US"/>
           </a:p>
@@ -863,7 +863,7 @@
           <a:p>
             <a:fld id="{513CA52F-1DA9-4BF4-A3AC-3E0151F9508D}" type="datetimeFigureOut">
               <a:rPr lang="en-US" smtClean="0"/>
-              <a:t>8/23/2026</a:t>
+              <a:t>9/1/2026</a:t>
             </a:fld>
             <a:endParaRPr lang="en-US"/>
           </a:p>
@@ -1138,7 +1138,7 @@
           <a:p>
             <a:fld id="{513CA52F-1DA9-4BF4-A3AC-3E0151F9508D}" type="datetimeFigureOut">
               <a:rPr lang="en-US" smtClean="0"/>
-              <a:t>8/23/2026</a:t>
+              <a:t>9/1/2026</a:t>
             </a:fld>
             <a:endParaRPr lang="en-US"/>
           </a:p>
@@ -1403,7 +1403,7 @@
           <a:p>
             <a:fld id="{513CA52F-1DA9-4BF4-A3AC-3E0151F9508D}" type="datetimeFigureOut">
               <a:rPr lang="en-US" smtClean="0"/>
-              <a:t>8/23/2026</a:t>
+              <a:t>9/1/2026</a:t>
             </a:fld>
             <a:endParaRPr lang="en-US"/>
           </a:p>
@@ -1815,7 +1815,7 @@
           <a:p>
             <a:fld id="{513CA52F-1DA9-4BF4-A3AC-3E0151F9508D}" type="datetimeFigureOut">
               <a:rPr lang="en-US" smtClean="0"/>
-              <a:t>8/23/2026</a:t>
+              <a:t>9/1/2026</a:t>
             </a:fld>
             <a:endParaRPr lang="en-US"/>
           </a:p>
@@ -1956,7 +1956,7 @@
           <a:p>
             <a:fld id="{513CA52F-1DA9-4BF4-A3AC-3E0151F9508D}" type="datetimeFigureOut">
               <a:rPr lang="en-US" smtClean="0"/>
-              <a:t>8/23/2026</a:t>
+              <a:t>9/1/2026</a:t>
             </a:fld>
             <a:endParaRPr lang="en-US"/>
           </a:p>
@@ -2069,7 +2069,7 @@
           <a:p>
             <a:fld id="{513CA52F-1DA9-4BF4-A3AC-3E0151F9508D}" type="datetimeFigureOut">
               <a:rPr lang="en-US" smtClean="0"/>
-              <a:t>8/23/2026</a:t>
+              <a:t>9/1/2026</a:t>
             </a:fld>
             <a:endParaRPr lang="en-US"/>
           </a:p>
@@ -2380,7 +2380,7 @@
           <a:p>
             <a:fld id="{513CA52F-1DA9-4BF4-A3AC-3E0151F9508D}" type="datetimeFigureOut">
               <a:rPr lang="en-US" smtClean="0"/>
-              <a:t>8/23/2026</a:t>
+              <a:t>9/1/2026</a:t>
             </a:fld>
             <a:endParaRPr lang="en-US"/>
           </a:p>
@@ -2668,7 +2668,7 @@
           <a:p>
             <a:fld id="{513CA52F-1DA9-4BF4-A3AC-3E0151F9508D}" type="datetimeFigureOut">
               <a:rPr lang="en-US" smtClean="0"/>
-              <a:t>8/23/2026</a:t>
+              <a:t>9/1/2026</a:t>
             </a:fld>
             <a:endParaRPr lang="en-US"/>
           </a:p>
@@ -2909,7 +2909,7 @@
           <a:p>
             <a:fld id="{513CA52F-1DA9-4BF4-A3AC-3E0151F9508D}" type="datetimeFigureOut">
               <a:rPr lang="en-US" smtClean="0"/>
-              <a:t>8/23/2026</a:t>
+              <a:t>9/1/2026</a:t>
             </a:fld>
             <a:endParaRPr lang="en-US"/>
           </a:p>
@@ -3328,10 +3328,10 @@
       </p:grpSpPr>
       <p:pic>
         <p:nvPicPr>
-          <p:cNvPr id="3" name="Picture 2">
-            <a:extLst>
-              <a:ext uri="{FF2B5EF4-FFF2-40B4-BE49-F238E27FC236}">
-                <a16:creationId xmlns:a16="http://schemas.microsoft.com/office/drawing/2014/main" id="{F2C5B188-B964-7B51-99D9-F5F4B91782C7}"/>
+          <p:cNvPr id="5" name="Picture 4">
+            <a:extLst>
+              <a:ext uri="{FF2B5EF4-FFF2-40B4-BE49-F238E27FC236}">
+                <a16:creationId xmlns:a16="http://schemas.microsoft.com/office/drawing/2014/main" id="{BBF9A011-9D09-D1E6-7490-76C6EBBFACDC}"/>
               </a:ext>
             </a:extLst>
           </p:cNvPr>
@@ -3342,43 +3342,6 @@
         </p:nvPicPr>
         <p:blipFill>
           <a:blip r:embed="rId2">
-            <a:extLst>
-              <a:ext uri="{28A0092B-C50C-407E-A947-70E740481C1C}">
-                <a14:useLocalDpi xmlns:a14="http://schemas.microsoft.com/office/drawing/2010/main" val="0"/>
-              </a:ext>
-            </a:extLst>
-          </a:blip>
-          <a:srcRect b="69067"/>
-          <a:stretch>
-            <a:fillRect/>
-          </a:stretch>
-        </p:blipFill>
-        <p:spPr>
-          <a:xfrm>
-            <a:off x="0" y="0"/>
-            <a:ext cx="12191695" cy="2121408"/>
-          </a:xfrm>
-          <a:prstGeom prst="rect">
-            <a:avLst/>
-          </a:prstGeom>
-        </p:spPr>
-      </p:pic>
-      <p:pic>
-        <p:nvPicPr>
-          <p:cNvPr id="5" name="Picture 4">
-            <a:extLst>
-              <a:ext uri="{FF2B5EF4-FFF2-40B4-BE49-F238E27FC236}">
-                <a16:creationId xmlns:a16="http://schemas.microsoft.com/office/drawing/2014/main" id="{BBF9A011-9D09-D1E6-7490-76C6EBBFACDC}"/>
-              </a:ext>
-            </a:extLst>
-          </p:cNvPr>
-          <p:cNvPicPr>
-            <a:picLocks noChangeAspect="1"/>
-          </p:cNvPicPr>
-          <p:nvPr/>
-        </p:nvPicPr>
-        <p:blipFill>
-          <a:blip r:embed="rId3">
             <a:extLst>
               <a:ext uri="{28A0092B-C50C-407E-A947-70E740481C1C}">
                 <a14:useLocalDpi xmlns:a14="http://schemas.microsoft.com/office/drawing/2010/main" val="0"/>
@@ -3414,7 +3377,7 @@
           <p:nvPr/>
         </p:nvPicPr>
         <p:blipFill>
-          <a:blip r:embed="rId4">
+          <a:blip r:embed="rId3">
             <a:extLst>
               <a:ext uri="{28A0092B-C50C-407E-A947-70E740481C1C}">
                 <a14:useLocalDpi xmlns:a14="http://schemas.microsoft.com/office/drawing/2010/main" val="0"/>
@@ -3450,7 +3413,7 @@
           <p:nvPr/>
         </p:nvPicPr>
         <p:blipFill>
-          <a:blip r:embed="rId5">
+          <a:blip r:embed="rId4">
             <a:extLst>
               <a:ext uri="{28A0092B-C50C-407E-A947-70E740481C1C}">
                 <a14:useLocalDpi xmlns:a14="http://schemas.microsoft.com/office/drawing/2010/main" val="0"/>
@@ -3466,6 +3429,43 @@
           <a:xfrm>
             <a:off x="7192969" y="2171697"/>
             <a:ext cx="4998726" cy="3383284"/>
+          </a:xfrm>
+          <a:prstGeom prst="rect">
+            <a:avLst/>
+          </a:prstGeom>
+        </p:spPr>
+      </p:pic>
+      <p:pic>
+        <p:nvPicPr>
+          <p:cNvPr id="3" name="Picture 2">
+            <a:extLst>
+              <a:ext uri="{FF2B5EF4-FFF2-40B4-BE49-F238E27FC236}">
+                <a16:creationId xmlns:a16="http://schemas.microsoft.com/office/drawing/2014/main" id="{DE3E547D-2C92-F4F2-3EA2-EFA538E6346B}"/>
+              </a:ext>
+            </a:extLst>
+          </p:cNvPr>
+          <p:cNvPicPr>
+            <a:picLocks noChangeAspect="1"/>
+          </p:cNvPicPr>
+          <p:nvPr/>
+        </p:nvPicPr>
+        <p:blipFill>
+          <a:blip r:embed="rId5">
+            <a:extLst>
+              <a:ext uri="{28A0092B-C50C-407E-A947-70E740481C1C}">
+                <a14:useLocalDpi xmlns:a14="http://schemas.microsoft.com/office/drawing/2010/main" val="0"/>
+              </a:ext>
+            </a:extLst>
+          </a:blip>
+          <a:srcRect t="2533" b="69200"/>
+          <a:stretch>
+            <a:fillRect/>
+          </a:stretch>
+        </p:blipFill>
+        <p:spPr>
+          <a:xfrm>
+            <a:off x="305" y="233170"/>
+            <a:ext cx="12191695" cy="1938526"/>
           </a:xfrm>
           <a:prstGeom prst="rect">
             <a:avLst/>
